--- a/product/01_taikenkai-kit/src/instagram_mikan.pptx
+++ b/product/01_taikenkai-kit/src/instagram_mikan.pptx
@@ -4380,7 +4380,7 @@
                 <a:ea typeface="Zen Maru Gothic"/>
                 <a:cs typeface="Zen Maru Gothic"/>
               </a:rPr>
-              <a:t>おえかき教室 そらいろ</a:t>
+              <a:t>○○おえかき教室</a:t>
             </a:r>
           </a:p>
         </p:txBody>
@@ -4829,7 +4829,7 @@
               </a:lnSpc>
             </a:pPr>
             <a:r>
-              <a:rPr sz="2400" b="0">
+              <a:rPr sz="2500" b="1">
                 <a:solidFill>
                   <a:srgbClr val="FFFFFF"/>
                 </a:solidFill>
@@ -4837,7 +4837,7 @@
                 <a:ea typeface="Zen Maru Gothic"/>
                 <a:cs typeface="Zen Maru Gothic"/>
               </a:rPr>
-              <a:t>10:00〜11:00　｜　3〜6さい　｜　500円</a:t>
+              <a:t>10:00〜11:00　｜　3さい〜年長　｜　500円</a:t>
             </a:r>
           </a:p>
         </p:txBody>
@@ -4870,7 +4870,7 @@
               </a:lnSpc>
             </a:pPr>
             <a:r>
-              <a:rPr sz="2200" b="0">
+              <a:rPr sz="2200" b="1">
                 <a:solidFill>
                   <a:srgbClr val="FFFFFF"/>
                 </a:solidFill>
@@ -5321,9 +5321,9 @@
               </a:lnSpc>
             </a:pPr>
             <a:r>
-              <a:rPr sz="2200" b="1">
+              <a:rPr sz="2100" b="1">
                 <a:solidFill>
-                  <a:srgbClr val="D9692F"/>
+                  <a:srgbClr val="3B332E"/>
                 </a:solidFill>
                 <a:latin typeface="Zen Maru Gothic"/>
                 <a:ea typeface="Zen Maru Gothic"/>
@@ -5450,9 +5450,9 @@
               </a:lnSpc>
             </a:pPr>
             <a:r>
-              <a:rPr sz="2200" b="1">
+              <a:rPr sz="2100" b="1">
                 <a:solidFill>
-                  <a:srgbClr val="D9692F"/>
+                  <a:srgbClr val="3B332E"/>
                 </a:solidFill>
                 <a:latin typeface="Zen Maru Gothic"/>
                 <a:ea typeface="Zen Maru Gothic"/>
@@ -5499,7 +5499,7 @@
                 <a:ea typeface="Zen Maru Gothic"/>
                 <a:cs typeface="Zen Maru Gothic"/>
               </a:rPr>
-              <a:t>3〜6さい（未就学のお子さん）</a:t>
+              <a:t>3さい〜年長さん</a:t>
             </a:r>
           </a:p>
         </p:txBody>
@@ -5561,9 +5561,9 @@
               </a:lnSpc>
             </a:pPr>
             <a:r>
-              <a:rPr sz="2200" b="1">
+              <a:rPr sz="2100" b="1">
                 <a:solidFill>
-                  <a:srgbClr val="D9692F"/>
+                  <a:srgbClr val="3B332E"/>
                 </a:solidFill>
                 <a:latin typeface="Zen Maru Gothic"/>
                 <a:ea typeface="Zen Maru Gothic"/>
@@ -5672,9 +5672,9 @@
               </a:lnSpc>
             </a:pPr>
             <a:r>
-              <a:rPr sz="2200" b="1">
+              <a:rPr sz="2100" b="1">
                 <a:solidFill>
-                  <a:srgbClr val="D9692F"/>
+                  <a:srgbClr val="3B332E"/>
                 </a:solidFill>
                 <a:latin typeface="Zen Maru Gothic"/>
                 <a:ea typeface="Zen Maru Gothic"/>
@@ -5783,9 +5783,9 @@
               </a:lnSpc>
             </a:pPr>
             <a:r>
-              <a:rPr sz="2200" b="1">
+              <a:rPr sz="2100" b="1">
                 <a:solidFill>
-                  <a:srgbClr val="D9692F"/>
+                  <a:srgbClr val="3B332E"/>
                 </a:solidFill>
                 <a:latin typeface="Zen Maru Gothic"/>
                 <a:ea typeface="Zen Maru Gothic"/>
@@ -5894,9 +5894,9 @@
               </a:lnSpc>
             </a:pPr>
             <a:r>
-              <a:rPr sz="2200" b="1">
+              <a:rPr sz="2100" b="1">
                 <a:solidFill>
-                  <a:srgbClr val="D9692F"/>
+                  <a:srgbClr val="3B332E"/>
                 </a:solidFill>
                 <a:latin typeface="Zen Maru Gothic"/>
                 <a:ea typeface="Zen Maru Gothic"/>
@@ -6005,9 +6005,9 @@
               </a:lnSpc>
             </a:pPr>
             <a:r>
-              <a:rPr sz="2200" b="1">
+              <a:rPr sz="2100" b="1">
                 <a:solidFill>
-                  <a:srgbClr val="D9692F"/>
+                  <a:srgbClr val="3B332E"/>
                 </a:solidFill>
                 <a:latin typeface="Zen Maru Gothic"/>
                 <a:ea typeface="Zen Maru Gothic"/>
@@ -6027,7 +6027,7 @@
         <p:spPr>
           <a:xfrm>
             <a:off x="2495550" y="8362950"/>
-            <a:ext cx="7048500" cy="1123950"/>
+            <a:ext cx="7048500" cy="685800"/>
           </a:xfrm>
           <a:prstGeom prst="rect">
             <a:avLst/>
@@ -6054,20 +6054,20 @@
                 <a:ea typeface="Zen Maru Gothic"/>
                 <a:cs typeface="Zen Maru Gothic"/>
               </a:rPr>
-              <a:t>○○市○○町（くわしい場所はお申し込み後にお知らせします）</a:t>
-            </a:r>
-          </a:p>
-        </p:txBody>
-      </p:sp>
-      <p:sp>
-        <p:nvSpPr>
-          <p:cNvPr id="26" name="項目名背景_申込"/>
+              <a:t>○○市○○町（くわしくはお申し込み後に）</a:t>
+            </a:r>
+          </a:p>
+        </p:txBody>
+      </p:sp>
+      <p:sp>
+        <p:nvSpPr>
+          <p:cNvPr id="26" name="項目名背景_申し込み"/>
           <p:cNvSpPr/>
           <p:nvPr/>
         </p:nvSpPr>
         <p:spPr>
           <a:xfrm>
-            <a:off x="762000" y="9677400"/>
+            <a:off x="762000" y="9239250"/>
             <a:ext cx="1428750" cy="495300"/>
           </a:xfrm>
           <a:prstGeom prst="roundRect">
@@ -6090,13 +6090,13 @@
       </p:sp>
       <p:sp>
         <p:nvSpPr>
-          <p:cNvPr id="27" name="項目名_申込"/>
+          <p:cNvPr id="27" name="項目名_申し込み"/>
           <p:cNvSpPr txBox="1"/>
           <p:nvPr/>
         </p:nvSpPr>
         <p:spPr>
           <a:xfrm>
-            <a:off x="762000" y="9677400"/>
+            <a:off x="762000" y="9239250"/>
             <a:ext cx="1428750" cy="495300"/>
           </a:xfrm>
           <a:prstGeom prst="rect">
@@ -6116,29 +6116,29 @@
               </a:lnSpc>
             </a:pPr>
             <a:r>
-              <a:rPr sz="2200" b="1">
+              <a:rPr sz="2100" b="1">
                 <a:solidFill>
-                  <a:srgbClr val="D9692F"/>
+                  <a:srgbClr val="3B332E"/>
                 </a:solidFill>
                 <a:latin typeface="Zen Maru Gothic"/>
                 <a:ea typeface="Zen Maru Gothic"/>
                 <a:cs typeface="Zen Maru Gothic"/>
               </a:rPr>
-              <a:t>申込</a:t>
-            </a:r>
-          </a:p>
-        </p:txBody>
-      </p:sp>
-      <p:sp>
-        <p:nvSpPr>
-          <p:cNvPr id="28" name="内容_申込"/>
+              <a:t>申し込み</a:t>
+            </a:r>
+          </a:p>
+        </p:txBody>
+      </p:sp>
+      <p:sp>
+        <p:nvSpPr>
+          <p:cNvPr id="28" name="内容_申し込み"/>
           <p:cNvSpPr txBox="1"/>
           <p:nvPr/>
         </p:nvSpPr>
         <p:spPr>
           <a:xfrm>
-            <a:off x="2495550" y="9715500"/>
-            <a:ext cx="7048500" cy="1123950"/>
+            <a:off x="2495550" y="9277350"/>
+            <a:ext cx="7048500" cy="1524000"/>
           </a:xfrm>
           <a:prstGeom prst="rect">
             <a:avLst/>
@@ -6184,6 +6184,24 @@
                 <a:cs typeface="Zen Maru Gothic"/>
               </a:rPr>
               <a:t>「お名前・年齢・希望日」を送ってください</a:t>
+            </a:r>
+          </a:p>
+          <a:p>
+            <a:pPr algn="l">
+              <a:lnSpc>
+                <a:spcPct val="130000"/>
+              </a:lnSpc>
+            </a:pPr>
+            <a:r>
+              <a:rPr sz="2300" b="0">
+                <a:solidFill>
+                  <a:srgbClr val="3B332E"/>
+                </a:solidFill>
+                <a:latin typeface="Zen Maru Gothic"/>
+                <a:ea typeface="Zen Maru Gothic"/>
+                <a:cs typeface="Zen Maru Gothic"/>
+              </a:rPr>
+              <a:t>しめきり：1月9日（土）</a:t>
             </a:r>
           </a:p>
         </p:txBody>
@@ -6311,8 +6329,8 @@
     </a:clrScheme>
     <a:fontScheme name="Office">
       <a:majorFont>
-        <a:latin typeface="Calibri"/>
-        <a:ea typeface=""/>
+        <a:latin typeface="Zen Maru Gothic"/>
+        <a:ea typeface="Zen Maru Gothic"/>
         <a:cs typeface=""/>
         <a:font script="Jpan" typeface="ＭＳ Ｐゴシック"/>
         <a:font script="Hang" typeface="맑은 고딕"/>
@@ -6346,8 +6364,8 @@
         <a:font script="Geor" typeface="Sylfaen"/>
       </a:majorFont>
       <a:minorFont>
-        <a:latin typeface="Calibri"/>
-        <a:ea typeface=""/>
+        <a:latin typeface="Zen Maru Gothic"/>
+        <a:ea typeface="Zen Maru Gothic"/>
         <a:cs typeface=""/>
         <a:font script="Jpan" typeface="ＭＳ Ｐゴシック"/>
         <a:font script="Hang" typeface="맑은 고딕"/>
